--- a/scripts/PowerPoint Slide Inventory Script/ibm_yaml_test.pptx
+++ b/scripts/PowerPoint Slide Inventory Script/ibm_yaml_test.pptx
@@ -15,6 +15,10 @@
     <p:sldId id="257" r:id="rId10"/>
     <p:sldId id="258" r:id="rId11"/>
     <p:sldId id="259" r:id="rId12"/>
+    <p:sldId id="260" r:id="rId13"/>
+    <p:sldId id="261" r:id="rId14"/>
+    <p:sldId id="262" r:id="rId15"/>
+    <p:sldId id="263" r:id="rId16"/>
   </p:sldIdLst>
   <p:sldSz cx="9144000" cy="5143500" type="screen16x9"/>
   <p:notesSz cx="6858000" cy="9144000"/>
@@ -13435,6 +13439,79 @@
           <a:lstStyle/>
           <a:p>
             <a:r>
+              <a:t>The chosen approach separates reasoning, rendering and template control</a:t>
+            </a:r>
+          </a:p>
+        </p:txBody>
+      </p:sp>
+      <p:sp>
+        <p:nvSpPr>
+          <p:cNvPr id="3" name="Text Placeholder 2"/>
+          <p:cNvSpPr>
+            <a:spLocks noGrp="1"/>
+          </p:cNvSpPr>
+          <p:nvPr>
+            <p:ph type="body" idx="12" sz="quarter"/>
+          </p:nvPr>
+        </p:nvSpPr>
+        <p:spPr/>
+        <p:txBody>
+          <a:bodyPr/>
+          <a:lstStyle/>
+          <a:p>
+            <a:pPr/>
+            <a:r>
+              <a:t>Narrative intent is defined in structured YAML</a:t>
+            </a:r>
+          </a:p>
+          <a:p>
+            <a:pPr/>
+            <a:r>
+              <a:t>The renderer maps modalities to approved layouts</a:t>
+            </a:r>
+          </a:p>
+          <a:p>
+            <a:pPr/>
+            <a:r>
+              <a:t>The template enforces visual consistency</a:t>
+            </a:r>
+          </a:p>
+        </p:txBody>
+      </p:sp>
+    </p:spTree>
+  </p:cSld>
+  <p:clrMapOvr>
+    <a:masterClrMapping/>
+  </p:clrMapOvr>
+</p:sld>
+</file>
+
+<file path=ppt/slides/slide5.xml><?xml version="1.0" encoding="utf-8"?>
+<p:sld xmlns:a="http://schemas.openxmlformats.org/drawingml/2006/main" xmlns:p="http://schemas.openxmlformats.org/presentationml/2006/main" xmlns:r="http://schemas.openxmlformats.org/officeDocument/2006/relationships">
+  <p:cSld>
+    <p:spTree>
+      <p:nvGrpSpPr>
+        <p:cNvPr id="1" name=""/>
+        <p:cNvGrpSpPr/>
+        <p:nvPr/>
+      </p:nvGrpSpPr>
+      <p:grpSpPr/>
+      <p:sp>
+        <p:nvSpPr>
+          <p:cNvPr id="2" name="Title 1"/>
+          <p:cNvSpPr>
+            <a:spLocks noGrp="1"/>
+          </p:cNvSpPr>
+          <p:nvPr>
+            <p:ph type="title"/>
+          </p:nvPr>
+        </p:nvSpPr>
+        <p:spPr/>
+        <p:txBody>
+          <a:bodyPr/>
+          <a:lstStyle/>
+          <a:p>
+            <a:r>
               <a:t>Architecture: narrative-driven slide generation pipeline</a:t>
             </a:r>
           </a:p>
@@ -13493,6 +13570,253 @@
         </p:blipFill>
         <p:spPr/>
       </p:pic>
+    </p:spTree>
+  </p:cSld>
+  <p:clrMapOvr>
+    <a:masterClrMapping/>
+  </p:clrMapOvr>
+</p:sld>
+</file>
+
+<file path=ppt/slides/slide6.xml><?xml version="1.0" encoding="utf-8"?>
+<p:sld xmlns:a="http://schemas.openxmlformats.org/drawingml/2006/main" xmlns:p="http://schemas.openxmlformats.org/presentationml/2006/main" xmlns:r="http://schemas.openxmlformats.org/officeDocument/2006/relationships">
+  <p:cSld>
+    <p:spTree>
+      <p:nvGrpSpPr>
+        <p:cNvPr id="1" name=""/>
+        <p:cNvGrpSpPr/>
+        <p:nvPr/>
+      </p:nvGrpSpPr>
+      <p:grpSpPr/>
+      <p:sp>
+        <p:nvSpPr>
+          <p:cNvPr id="2" name="Title 1"/>
+          <p:cNvSpPr>
+            <a:spLocks noGrp="1"/>
+          </p:cNvSpPr>
+          <p:nvPr>
+            <p:ph type="title"/>
+          </p:nvPr>
+        </p:nvSpPr>
+        <p:spPr/>
+        <p:txBody>
+          <a:bodyPr/>
+          <a:lstStyle/>
+          <a:p>
+            <a:r>
+              <a:t>The mechanics are now proven, but image handling and modality growth remain</a:t>
+            </a:r>
+          </a:p>
+        </p:txBody>
+      </p:sp>
+      <p:sp>
+        <p:nvSpPr>
+          <p:cNvPr id="3" name="Text Placeholder 2"/>
+          <p:cNvSpPr>
+            <a:spLocks noGrp="1"/>
+          </p:cNvSpPr>
+          <p:nvPr>
+            <p:ph type="body" idx="12" sz="quarter"/>
+          </p:nvPr>
+        </p:nvSpPr>
+        <p:spPr/>
+        <p:txBody>
+          <a:bodyPr/>
+          <a:lstStyle/>
+          <a:p>
+            <a:pPr/>
+            <a:r>
+              <a:t>Template conversion from POTX to PPTX works locally</a:t>
+            </a:r>
+          </a:p>
+          <a:p>
+            <a:pPr/>
+            <a:r>
+              <a:t>IBM placeholder mappings are now reliable</a:t>
+            </a:r>
+          </a:p>
+          <a:p>
+            <a:pPr/>
+            <a:r>
+              <a:t>Picture insertion requires controlled image sizing</a:t>
+            </a:r>
+          </a:p>
+          <a:p>
+            <a:pPr/>
+            <a:r>
+              <a:t>The next step is to expand modality coverage carefully</a:t>
+            </a:r>
+          </a:p>
+        </p:txBody>
+      </p:sp>
+    </p:spTree>
+  </p:cSld>
+  <p:clrMapOvr>
+    <a:masterClrMapping/>
+  </p:clrMapOvr>
+</p:sld>
+</file>
+
+<file path=ppt/slides/slide7.xml><?xml version="1.0" encoding="utf-8"?>
+<p:sld xmlns:a="http://schemas.openxmlformats.org/drawingml/2006/main" xmlns:p="http://schemas.openxmlformats.org/presentationml/2006/main" xmlns:r="http://schemas.openxmlformats.org/officeDocument/2006/relationships">
+  <p:cSld>
+    <p:spTree>
+      <p:nvGrpSpPr>
+        <p:cNvPr id="1" name=""/>
+        <p:cNvGrpSpPr/>
+        <p:nvPr/>
+      </p:nvGrpSpPr>
+      <p:grpSpPr/>
+      <p:sp>
+        <p:nvSpPr>
+          <p:cNvPr id="2" name="Title 1"/>
+          <p:cNvSpPr>
+            <a:spLocks noGrp="1"/>
+          </p:cNvSpPr>
+          <p:nvPr>
+            <p:ph type="title"/>
+          </p:nvPr>
+        </p:nvSpPr>
+        <p:spPr/>
+        <p:txBody>
+          <a:bodyPr/>
+          <a:lstStyle/>
+          <a:p>
+            <a:r>
+              <a:t>The generator can now evolve independently of the visual theme</a:t>
+            </a:r>
+          </a:p>
+        </p:txBody>
+      </p:sp>
+      <p:sp>
+        <p:nvSpPr>
+          <p:cNvPr id="3" name="Text Placeholder 2"/>
+          <p:cNvSpPr>
+            <a:spLocks noGrp="1"/>
+          </p:cNvSpPr>
+          <p:nvPr>
+            <p:ph type="body" idx="12" sz="quarter"/>
+          </p:nvPr>
+        </p:nvSpPr>
+        <p:spPr/>
+        <p:txBody>
+          <a:bodyPr/>
+          <a:lstStyle/>
+          <a:p>
+            <a:pPr/>
+            <a:r>
+              <a:t>Narrative structure is no longer tied directly to IBM layout names</a:t>
+            </a:r>
+          </a:p>
+          <a:p>
+            <a:pPr/>
+            <a:r>
+              <a:t>The same modalities could later map to Microsoft-themed layouts</a:t>
+            </a:r>
+          </a:p>
+          <a:p>
+            <a:pPr/>
+            <a:r>
+              <a:t>Claude can generate content without needing PowerPoint awareness</a:t>
+            </a:r>
+          </a:p>
+        </p:txBody>
+      </p:sp>
+    </p:spTree>
+  </p:cSld>
+  <p:clrMapOvr>
+    <a:masterClrMapping/>
+  </p:clrMapOvr>
+</p:sld>
+</file>
+
+<file path=ppt/slides/slide8.xml><?xml version="1.0" encoding="utf-8"?>
+<p:sld xmlns:a="http://schemas.openxmlformats.org/drawingml/2006/main" xmlns:p="http://schemas.openxmlformats.org/presentationml/2006/main" xmlns:r="http://schemas.openxmlformats.org/officeDocument/2006/relationships">
+  <p:cSld>
+    <p:spTree>
+      <p:nvGrpSpPr>
+        <p:cNvPr id="1" name=""/>
+        <p:cNvGrpSpPr/>
+        <p:nvPr/>
+      </p:nvGrpSpPr>
+      <p:grpSpPr/>
+      <p:sp>
+        <p:nvSpPr>
+          <p:cNvPr id="2" name="Title 1"/>
+          <p:cNvSpPr>
+            <a:spLocks noGrp="1"/>
+          </p:cNvSpPr>
+          <p:nvPr>
+            <p:ph type="title"/>
+          </p:nvPr>
+        </p:nvSpPr>
+        <p:spPr/>
+        <p:txBody>
+          <a:bodyPr/>
+          <a:lstStyle/>
+          <a:p>
+            <a:r>
+              <a:t>The next phase is to formalise schema and extend supported slide types</a:t>
+            </a:r>
+          </a:p>
+        </p:txBody>
+      </p:sp>
+      <p:sp>
+        <p:nvSpPr>
+          <p:cNvPr id="3" name="Text Placeholder 2"/>
+          <p:cNvSpPr>
+            <a:spLocks noGrp="1"/>
+          </p:cNvSpPr>
+          <p:nvPr>
+            <p:ph type="body" idx="13" sz="quarter"/>
+          </p:nvPr>
+        </p:nvSpPr>
+        <p:spPr/>
+        <p:txBody>
+          <a:bodyPr/>
+          <a:lstStyle/>
+          <a:p>
+            <a:pPr/>
+            <a:r>
+              <a:t>Add evidence and results modality</a:t>
+            </a:r>
+          </a:p>
+          <a:p>
+            <a:pPr/>
+            <a:r>
+              <a:t>Add options considered modality</a:t>
+            </a:r>
+          </a:p>
+        </p:txBody>
+      </p:sp>
+      <p:sp>
+        <p:nvSpPr>
+          <p:cNvPr id="4" name="Text Placeholder 3"/>
+          <p:cNvSpPr>
+            <a:spLocks noGrp="1"/>
+          </p:cNvSpPr>
+          <p:nvPr>
+            <p:ph type="body" idx="12" sz="quarter"/>
+          </p:nvPr>
+        </p:nvSpPr>
+        <p:spPr/>
+        <p:txBody>
+          <a:bodyPr/>
+          <a:lstStyle/>
+          <a:p>
+            <a:pPr/>
+            <a:r>
+              <a:t>Define a proper JSON or YAML schema</a:t>
+            </a:r>
+          </a:p>
+          <a:p>
+            <a:pPr/>
+            <a:r>
+              <a:t>Introduce validation for text density and image sizing</a:t>
+            </a:r>
+          </a:p>
+        </p:txBody>
+      </p:sp>
     </p:spTree>
   </p:cSld>
   <p:clrMapOvr>

--- a/scripts/PowerPoint Slide Inventory Script/ibm_yaml_test.pptx
+++ b/scripts/PowerPoint Slide Inventory Script/ibm_yaml_test.pptx
@@ -13551,24 +13551,72 @@
           </a:p>
         </p:txBody>
       </p:sp>
+      <p:sp>
+        <p:nvSpPr>
+          <p:cNvPr id="5" name="Rectangle 4"/>
+          <p:cNvSpPr/>
+          <p:nvPr/>
+        </p:nvSpPr>
+        <p:spPr>
+          <a:xfrm>
+            <a:off x="4572000" y="0"/>
+            <a:ext cx="4572000" cy="5143500"/>
+          </a:xfrm>
+          <a:prstGeom prst="rect">
+            <a:avLst/>
+          </a:prstGeom>
+          <a:solidFill>
+            <a:srgbClr val="FFFFFF"/>
+          </a:solidFill>
+          <a:ln>
+            <a:noFill/>
+          </a:ln>
+        </p:spPr>
+        <p:style>
+          <a:lnRef idx="1">
+            <a:schemeClr val="accent1"/>
+          </a:lnRef>
+          <a:fillRef idx="3">
+            <a:schemeClr val="accent1"/>
+          </a:fillRef>
+          <a:effectRef idx="2">
+            <a:schemeClr val="accent1"/>
+          </a:effectRef>
+          <a:fontRef idx="minor">
+            <a:schemeClr val="lt1"/>
+          </a:fontRef>
+        </p:style>
+        <p:txBody>
+          <a:bodyPr rtlCol="0" anchor="ctr"/>
+          <a:lstStyle/>
+          <a:p>
+            <a:pPr algn="ctr"/>
+          </a:p>
+        </p:txBody>
+      </p:sp>
       <p:pic>
         <p:nvPicPr>
-          <p:cNvPr id="4" name="Picture Placeholder 3" descr="example_architecture.png"/>
+          <p:cNvPr id="6" name="Picture 5" descr="example_architecture.png"/>
           <p:cNvPicPr>
-            <a:picLocks noGrp="1" noChangeAspect="1"/>
+            <a:picLocks noChangeAspect="1"/>
           </p:cNvPicPr>
-          <p:nvPr>
-            <p:ph type="pic" idx="14" sz="quarter"/>
-          </p:nvPr>
+          <p:nvPr/>
         </p:nvPicPr>
         <p:blipFill>
           <a:blip r:embed="rId2"/>
-          <a:srcRect l="20370" r="20370"/>
           <a:stretch>
             <a:fillRect/>
           </a:stretch>
         </p:blipFill>
-        <p:spPr/>
+        <p:spPr>
+          <a:xfrm>
+            <a:off x="4572000" y="1047750"/>
+            <a:ext cx="4572000" cy="3048000"/>
+          </a:xfrm>
+          <a:prstGeom prst="rect">
+            <a:avLst/>
+          </a:prstGeom>
+        </p:spPr>
       </p:pic>
     </p:spTree>
   </p:cSld>

--- a/scripts/PowerPoint Slide Inventory Script/ibm_yaml_test.pptx
+++ b/scripts/PowerPoint Slide Inventory Script/ibm_yaml_test.pptx
@@ -13610,8 +13610,8 @@
         </p:blipFill>
         <p:spPr>
           <a:xfrm>
-            <a:off x="4572000" y="1047750"/>
-            <a:ext cx="4572000" cy="3048000"/>
+            <a:off x="4937760" y="1291590"/>
+            <a:ext cx="3840480" cy="2560320"/>
           </a:xfrm>
           <a:prstGeom prst="rect">
             <a:avLst/>
